--- a/veridi_logistics_presentation.pptx
+++ b/veridi_logistics_presentation.pptx
@@ -118,6 +118,50 @@
     </p:ext>
   </p:extLst>
 </p:presentation>
+</file>
+
+<file path=ppt/changesInfos/changesInfo1.xml><?xml version="1.0" encoding="utf-8"?>
+<pc:chgInfo xmlns:a="http://schemas.openxmlformats.org/drawingml/2006/main" xmlns:r="http://schemas.openxmlformats.org/officeDocument/2006/relationships" xmlns:ac="http://schemas.microsoft.com/office/drawing/2013/main/command" xmlns:pc="http://schemas.microsoft.com/office/powerpoint/2013/main/command">
+  <pc:docChgLst>
+    <pc:chgData name="Angela Tenkorang" userId="a40b4ec4-8edb-4146-96fa-bcd28e8b0fac" providerId="ADAL" clId="{2E99353F-591A-498E-A5C3-B5ECD380E5CD}"/>
+    <pc:docChg chg="modSld">
+      <pc:chgData name="Angela Tenkorang" userId="a40b4ec4-8edb-4146-96fa-bcd28e8b0fac" providerId="ADAL" clId="{2E99353F-591A-498E-A5C3-B5ECD380E5CD}" dt="2026-04-27T11:03:21.335" v="3" actId="20577"/>
+      <pc:docMkLst>
+        <pc:docMk/>
+      </pc:docMkLst>
+      <pc:sldChg chg="modSp mod">
+        <pc:chgData name="Angela Tenkorang" userId="a40b4ec4-8edb-4146-96fa-bcd28e8b0fac" providerId="ADAL" clId="{2E99353F-591A-498E-A5C3-B5ECD380E5CD}" dt="2026-04-27T11:03:11.970" v="1" actId="20577"/>
+        <pc:sldMkLst>
+          <pc:docMk/>
+          <pc:sldMk cId="0" sldId="258"/>
+        </pc:sldMkLst>
+        <pc:spChg chg="mod">
+          <ac:chgData name="Angela Tenkorang" userId="a40b4ec4-8edb-4146-96fa-bcd28e8b0fac" providerId="ADAL" clId="{2E99353F-591A-498E-A5C3-B5ECD380E5CD}" dt="2026-04-27T11:03:11.970" v="1" actId="20577"/>
+          <ac:spMkLst>
+            <pc:docMk/>
+            <pc:sldMk cId="0" sldId="258"/>
+            <ac:spMk id="32" creationId="{00000000-0000-0000-0000-000000000000}"/>
+          </ac:spMkLst>
+        </pc:spChg>
+      </pc:sldChg>
+      <pc:sldChg chg="modSp mod">
+        <pc:chgData name="Angela Tenkorang" userId="a40b4ec4-8edb-4146-96fa-bcd28e8b0fac" providerId="ADAL" clId="{2E99353F-591A-498E-A5C3-B5ECD380E5CD}" dt="2026-04-27T11:03:21.335" v="3" actId="20577"/>
+        <pc:sldMkLst>
+          <pc:docMk/>
+          <pc:sldMk cId="0" sldId="261"/>
+        </pc:sldMkLst>
+        <pc:spChg chg="mod">
+          <ac:chgData name="Angela Tenkorang" userId="a40b4ec4-8edb-4146-96fa-bcd28e8b0fac" providerId="ADAL" clId="{2E99353F-591A-498E-A5C3-B5ECD380E5CD}" dt="2026-04-27T11:03:21.335" v="3" actId="20577"/>
+          <ac:spMkLst>
+            <pc:docMk/>
+            <pc:sldMk cId="0" sldId="261"/>
+            <ac:spMk id="4" creationId="{00000000-0000-0000-0000-000000000000}"/>
+          </ac:spMkLst>
+        </pc:spChg>
+      </pc:sldChg>
+    </pc:docChg>
+  </pc:docChgLst>
+</pc:chgInfo>
 </file>
 
 <file path=ppt/charts/chart1.xml><?xml version="1.0" encoding="utf-8"?>
@@ -547,7 +591,7 @@
           <a:bodyPr/>
           <a:lstStyle/>
           <a:p>
-            <a:endParaRPr lang="en-US" dirty="0"/>
+            <a:endParaRPr lang="en-US"/>
           </a:p>
         </p:txBody>
       </p:sp>
@@ -631,7 +675,7 @@
           <a:bodyPr/>
           <a:lstStyle/>
           <a:p>
-            <a:endParaRPr lang="en-US" dirty="0"/>
+            <a:endParaRPr lang="en-US"/>
           </a:p>
         </p:txBody>
       </p:sp>
@@ -715,7 +759,7 @@
           <a:bodyPr/>
           <a:lstStyle/>
           <a:p>
-            <a:endParaRPr lang="en-US" dirty="0"/>
+            <a:endParaRPr lang="en-US"/>
           </a:p>
         </p:txBody>
       </p:sp>
@@ -799,7 +843,7 @@
           <a:bodyPr/>
           <a:lstStyle/>
           <a:p>
-            <a:endParaRPr lang="en-US" dirty="0"/>
+            <a:endParaRPr lang="en-US"/>
           </a:p>
         </p:txBody>
       </p:sp>
@@ -883,7 +927,7 @@
           <a:bodyPr/>
           <a:lstStyle/>
           <a:p>
-            <a:endParaRPr lang="en-US" dirty="0"/>
+            <a:endParaRPr lang="en-US"/>
           </a:p>
         </p:txBody>
       </p:sp>
@@ -967,7 +1011,7 @@
           <a:bodyPr/>
           <a:lstStyle/>
           <a:p>
-            <a:endParaRPr lang="en-US" dirty="0"/>
+            <a:endParaRPr lang="en-US"/>
           </a:p>
         </p:txBody>
       </p:sp>
@@ -1051,7 +1095,7 @@
           <a:bodyPr/>
           <a:lstStyle/>
           <a:p>
-            <a:endParaRPr lang="en-US" dirty="0"/>
+            <a:endParaRPr lang="en-US"/>
           </a:p>
         </p:txBody>
       </p:sp>
@@ -1135,7 +1179,7 @@
           <a:bodyPr/>
           <a:lstStyle/>
           <a:p>
-            <a:endParaRPr lang="en-US" dirty="0"/>
+            <a:endParaRPr lang="en-US"/>
           </a:p>
         </p:txBody>
       </p:sp>
@@ -1219,7 +1263,7 @@
           <a:bodyPr/>
           <a:lstStyle/>
           <a:p>
-            <a:endParaRPr lang="en-US" dirty="0"/>
+            <a:endParaRPr lang="en-US"/>
           </a:p>
         </p:txBody>
       </p:sp>
@@ -1619,7 +1663,7 @@
           <a:bodyPr/>
           <a:lstStyle/>
           <a:p>
-            <a:endParaRPr lang="en-GH" dirty="0"/>
+            <a:endParaRPr lang="en-GH"/>
           </a:p>
         </p:txBody>
       </p:sp>
@@ -1702,7 +1746,7 @@
               <a:buNone/>
             </a:pPr>
             <a:r>
-              <a:rPr lang="en-US" sz="4400" b="1" kern="0" spc="400" dirty="0">
+              <a:rPr lang="en-US" sz="4400" b="1" kern="0" spc="400">
                 <a:solidFill>
                   <a:srgbClr val="FFFFFF"/>
                 </a:solidFill>
@@ -1712,7 +1756,7 @@
               </a:rPr>
               <a:t>VERIDI LOGISTICS</a:t>
             </a:r>
-            <a:endParaRPr lang="en-US" sz="4400" dirty="0"/>
+            <a:endParaRPr lang="en-US" sz="4400"/>
           </a:p>
         </p:txBody>
       </p:sp>
@@ -1741,7 +1785,7 @@
               <a:buNone/>
             </a:pPr>
             <a:r>
-              <a:rPr lang="en-US" sz="2400" i="1" dirty="0">
+              <a:rPr lang="en-US" sz="2400" i="1">
                 <a:solidFill>
                   <a:srgbClr val="D6E8F7"/>
                 </a:solidFill>
@@ -1751,7 +1795,7 @@
               </a:rPr>
               <a:t>Delivery Performance Audit</a:t>
             </a:r>
-            <a:endParaRPr lang="en-US" sz="2400" dirty="0"/>
+            <a:endParaRPr lang="en-US" sz="2400"/>
           </a:p>
         </p:txBody>
       </p:sp>
@@ -1810,7 +1854,7 @@
               <a:buNone/>
             </a:pPr>
             <a:r>
-              <a:rPr lang="en-US" sz="1200" dirty="0">
+              <a:rPr lang="en-US" sz="1200">
                 <a:solidFill>
                   <a:srgbClr val="8BAFC8"/>
                 </a:solidFill>
@@ -1820,7 +1864,7 @@
               </a:rPr>
               <a:t>Olist Brazilian E-Commerce Dataset  |  98,207 Orders Audited  </a:t>
             </a:r>
-            <a:endParaRPr lang="en-US" sz="1200" dirty="0"/>
+            <a:endParaRPr lang="en-US" sz="1200"/>
           </a:p>
         </p:txBody>
       </p:sp>
@@ -1849,7 +1893,7 @@
               <a:buNone/>
             </a:pPr>
             <a:r>
-              <a:rPr lang="en-US" sz="1400" b="1" dirty="0">
+              <a:rPr lang="en-US" sz="1400" b="1">
                 <a:solidFill>
                   <a:srgbClr val="D6E8F7"/>
                 </a:solidFill>
@@ -1859,7 +1903,7 @@
               </a:rPr>
               <a:t>Angela Tenkorang  |  AmaliTech</a:t>
             </a:r>
-            <a:endParaRPr lang="en-US" sz="1400" dirty="0"/>
+            <a:endParaRPr lang="en-US" sz="1400"/>
           </a:p>
         </p:txBody>
       </p:sp>
@@ -1888,7 +1932,7 @@
               <a:buNone/>
             </a:pPr>
             <a:r>
-              <a:rPr lang="en-US" sz="1200" dirty="0">
+              <a:rPr lang="en-US" sz="1200">
                 <a:solidFill>
                   <a:srgbClr val="8BAFC8"/>
                 </a:solidFill>
@@ -1898,7 +1942,7 @@
               </a:rPr>
               <a:t>Data Analyst</a:t>
             </a:r>
-            <a:endParaRPr lang="en-US" sz="1200" dirty="0"/>
+            <a:endParaRPr lang="en-US" sz="1200"/>
           </a:p>
         </p:txBody>
       </p:sp>
@@ -1987,7 +2031,7 @@
               <a:buNone/>
             </a:pPr>
             <a:r>
-              <a:rPr lang="en-US" sz="1800" b="1" kern="0" spc="200" dirty="0">
+              <a:rPr lang="en-US" sz="1800" b="1" kern="0" spc="200">
                 <a:solidFill>
                   <a:srgbClr val="FFFFFF"/>
                 </a:solidFill>
@@ -1997,7 +2041,7 @@
               </a:rPr>
               <a:t>THE BUSINESS PROBLEM</a:t>
             </a:r>
-            <a:endParaRPr lang="en-US" sz="1800" dirty="0"/>
+            <a:endParaRPr lang="en-US" sz="1800"/>
           </a:p>
         </p:txBody>
       </p:sp>
@@ -2060,7 +2104,7 @@
               <a:buNone/>
             </a:pPr>
             <a:r>
-              <a:rPr lang="en-US" sz="1800" b="1" dirty="0">
+              <a:rPr lang="en-US" sz="1800" b="1">
                 <a:solidFill>
                   <a:srgbClr val="1A3A5C"/>
                 </a:solidFill>
@@ -2070,14 +2114,14 @@
               </a:rPr>
               <a:t>The CEO's Question</a:t>
             </a:r>
-            <a:endParaRPr lang="en-US" sz="1800" dirty="0"/>
+            <a:endParaRPr lang="en-US" sz="1800"/>
           </a:p>
           <a:p>
             <a:pPr marL="0" indent="0">
               <a:buNone/>
             </a:pPr>
             <a:r>
-              <a:rPr lang="en-US" sz="800" dirty="0">
+              <a:rPr lang="en-US" sz="800">
                 <a:solidFill>
                   <a:srgbClr val="000000"/>
                 </a:solidFill>
@@ -2087,14 +2131,14 @@
               </a:rPr>
               <a:t> </a:t>
             </a:r>
-            <a:endParaRPr lang="en-US" sz="1800" dirty="0"/>
+            <a:endParaRPr lang="en-US" sz="1800"/>
           </a:p>
           <a:p>
             <a:pPr marL="0" indent="0">
               <a:buNone/>
             </a:pPr>
             <a:r>
-              <a:rPr lang="en-US" sz="1500" i="1" dirty="0">
+              <a:rPr lang="en-US" sz="1500" i="1">
                 <a:solidFill>
                   <a:srgbClr val="0D1B2A"/>
                 </a:solidFill>
@@ -2104,14 +2148,14 @@
               </a:rPr>
               <a:t>"Are we failing specific regions</a:t>
             </a:r>
-            <a:endParaRPr lang="en-US" sz="1800" dirty="0"/>
+            <a:endParaRPr lang="en-US" sz="1800"/>
           </a:p>
           <a:p>
             <a:pPr marL="0" indent="0">
               <a:buNone/>
             </a:pPr>
             <a:r>
-              <a:rPr lang="en-US" sz="1500" i="1" dirty="0">
+              <a:rPr lang="en-US" sz="1500" i="1">
                 <a:solidFill>
                   <a:srgbClr val="0D1B2A"/>
                 </a:solidFill>
@@ -2121,7 +2165,7 @@
               </a:rPr>
               <a:t>or is this a nationwide problem?"</a:t>
             </a:r>
-            <a:endParaRPr lang="en-US" sz="1800" dirty="0"/>
+            <a:endParaRPr lang="en-US" sz="1800"/>
           </a:p>
         </p:txBody>
       </p:sp>
@@ -2151,7 +2195,7 @@
               <a:buChar char="•"/>
             </a:pPr>
             <a:r>
-              <a:rPr lang="en-US" sz="1300" dirty="0">
+              <a:rPr lang="en-US" sz="1300">
                 <a:solidFill>
                   <a:srgbClr val="333333"/>
                 </a:solidFill>
@@ -2161,7 +2205,7 @@
               </a:rPr>
               <a:t>Spike in negative customer reviews</a:t>
             </a:r>
-            <a:endParaRPr lang="en-US" sz="1300" dirty="0"/>
+            <a:endParaRPr lang="en-US" sz="1300"/>
           </a:p>
           <a:p>
             <a:pPr marL="342900" indent="-342900">
@@ -2169,7 +2213,7 @@
               <a:buChar char="•"/>
             </a:pPr>
             <a:r>
-              <a:rPr lang="en-US" sz="1300" dirty="0">
+              <a:rPr lang="en-US" sz="1300">
                 <a:solidFill>
                   <a:srgbClr val="333333"/>
                 </a:solidFill>
@@ -2179,7 +2223,7 @@
               </a:rPr>
               <a:t>Delivery dates suspected to be over-promised</a:t>
             </a:r>
-            <a:endParaRPr lang="en-US" sz="1300" dirty="0"/>
+            <a:endParaRPr lang="en-US" sz="1300"/>
           </a:p>
           <a:p>
             <a:pPr marL="342900" indent="-342900">
@@ -2187,7 +2231,7 @@
               <a:buChar char="•"/>
             </a:pPr>
             <a:r>
-              <a:rPr lang="en-US" sz="1300" dirty="0">
+              <a:rPr lang="en-US" sz="1300">
                 <a:solidFill>
                   <a:srgbClr val="333333"/>
                 </a:solidFill>
@@ -2197,7 +2241,7 @@
               </a:rPr>
               <a:t>No data to pinpoint the root cause</a:t>
             </a:r>
-            <a:endParaRPr lang="en-US" sz="1300" dirty="0"/>
+            <a:endParaRPr lang="en-US" sz="1300"/>
           </a:p>
           <a:p>
             <a:pPr marL="342900" indent="-342900">
@@ -2205,7 +2249,7 @@
               <a:buChar char="•"/>
             </a:pPr>
             <a:r>
-              <a:rPr lang="en-US" sz="1300" dirty="0">
+              <a:rPr lang="en-US" sz="1300">
                 <a:solidFill>
                   <a:srgbClr val="333333"/>
                 </a:solidFill>
@@ -2215,7 +2259,7 @@
               </a:rPr>
               <a:t>98,207 orders audited across Brazil</a:t>
             </a:r>
-            <a:endParaRPr lang="en-US" sz="1300" dirty="0"/>
+            <a:endParaRPr lang="en-US" sz="1300"/>
           </a:p>
         </p:txBody>
       </p:sp>
@@ -2278,7 +2322,7 @@
               <a:buNone/>
             </a:pPr>
             <a:r>
-              <a:rPr lang="en-US" sz="1600" b="1" dirty="0">
+              <a:rPr lang="en-US" sz="1600" b="1">
                 <a:solidFill>
                   <a:srgbClr val="FFFFFF"/>
                 </a:solidFill>
@@ -2288,7 +2332,7 @@
               </a:rPr>
               <a:t>Lost Revenue</a:t>
             </a:r>
-            <a:endParaRPr lang="en-US" sz="1600" dirty="0"/>
+            <a:endParaRPr lang="en-US" sz="1600"/>
           </a:p>
         </p:txBody>
       </p:sp>
@@ -2351,7 +2395,7 @@
               <a:buNone/>
             </a:pPr>
             <a:r>
-              <a:rPr lang="en-US" sz="1600" b="1" dirty="0">
+              <a:rPr lang="en-US" sz="1600" b="1">
                 <a:solidFill>
                   <a:srgbClr val="FFFFFF"/>
                 </a:solidFill>
@@ -2361,7 +2405,7 @@
               </a:rPr>
               <a:t>Bad Reviews</a:t>
             </a:r>
-            <a:endParaRPr lang="en-US" sz="1600" dirty="0"/>
+            <a:endParaRPr lang="en-US" sz="1600"/>
           </a:p>
         </p:txBody>
       </p:sp>
@@ -2424,7 +2468,7 @@
               <a:buNone/>
             </a:pPr>
             <a:r>
-              <a:rPr lang="en-US" sz="1600" b="1" dirty="0">
+              <a:rPr lang="en-US" sz="1600" b="1">
                 <a:solidFill>
                   <a:srgbClr val="FFFFFF"/>
                 </a:solidFill>
@@ -2434,7 +2478,7 @@
               </a:rPr>
               <a:t>No Root Cause</a:t>
             </a:r>
-            <a:endParaRPr lang="en-US" sz="1600" dirty="0"/>
+            <a:endParaRPr lang="en-US" sz="1600"/>
           </a:p>
         </p:txBody>
       </p:sp>
@@ -2463,7 +2507,7 @@
               <a:buNone/>
             </a:pPr>
             <a:r>
-              <a:rPr lang="en-US" sz="1200" i="1" dirty="0">
+              <a:rPr lang="en-US" sz="1200" i="1">
                 <a:solidFill>
                   <a:srgbClr val="64748B"/>
                 </a:solidFill>
@@ -2473,7 +2517,7 @@
               </a:rPr>
               <a:t>This audit connects the dots between logistics data and customer sentiment.</a:t>
             </a:r>
-            <a:endParaRPr lang="en-US" sz="1200" dirty="0"/>
+            <a:endParaRPr lang="en-US" sz="1200"/>
           </a:p>
         </p:txBody>
       </p:sp>
@@ -2562,7 +2606,7 @@
               <a:buNone/>
             </a:pPr>
             <a:r>
-              <a:rPr lang="en-US" sz="1800" b="1" kern="0" spc="200" dirty="0">
+              <a:rPr lang="en-US" sz="1800" b="1" kern="0" spc="200">
                 <a:solidFill>
                   <a:srgbClr val="FFFFFF"/>
                 </a:solidFill>
@@ -2572,7 +2616,7 @@
               </a:rPr>
               <a:t>OUR SPRINT-BASED APPROACH</a:t>
             </a:r>
-            <a:endParaRPr lang="en-US" sz="1800" dirty="0"/>
+            <a:endParaRPr lang="en-US" sz="1800"/>
           </a:p>
         </p:txBody>
       </p:sp>
@@ -2601,7 +2645,7 @@
               <a:buNone/>
             </a:pPr>
             <a:r>
-              <a:rPr lang="en-US" sz="1300" i="1" dirty="0">
+              <a:rPr lang="en-US" sz="1300" i="1">
                 <a:solidFill>
                   <a:srgbClr val="64748B"/>
                 </a:solidFill>
@@ -2611,7 +2655,7 @@
               </a:rPr>
               <a:t>The project was broken into structured sprints ,each with a clear goal and deliverable, building on the previous.</a:t>
             </a:r>
-            <a:endParaRPr lang="en-US" sz="1300" dirty="0"/>
+            <a:endParaRPr lang="en-US" sz="1300"/>
           </a:p>
         </p:txBody>
       </p:sp>
@@ -2701,7 +2745,7 @@
               <a:buNone/>
             </a:pPr>
             <a:r>
-              <a:rPr lang="en-US" sz="2000" b="1" dirty="0">
+              <a:rPr lang="en-US" sz="2000" b="1">
                 <a:solidFill>
                   <a:srgbClr val="FFFFFF"/>
                 </a:solidFill>
@@ -2711,7 +2755,7 @@
               </a:rPr>
               <a:t>1</a:t>
             </a:r>
-            <a:endParaRPr lang="en-US" sz="2000" dirty="0"/>
+            <a:endParaRPr lang="en-US" sz="2000"/>
           </a:p>
         </p:txBody>
       </p:sp>
@@ -2740,7 +2784,7 @@
               <a:buNone/>
             </a:pPr>
             <a:r>
-              <a:rPr lang="en-US" sz="1300" b="1" dirty="0">
+              <a:rPr lang="en-US" sz="1300" b="1">
                 <a:solidFill>
                   <a:srgbClr val="0D1B2A"/>
                 </a:solidFill>
@@ -2750,7 +2794,7 @@
               </a:rPr>
               <a:t>Master Table</a:t>
             </a:r>
-            <a:endParaRPr lang="en-US" sz="1300" dirty="0"/>
+            <a:endParaRPr lang="en-US" sz="1300"/>
           </a:p>
         </p:txBody>
       </p:sp>
@@ -2779,7 +2823,7 @@
               <a:buNone/>
             </a:pPr>
             <a:r>
-              <a:rPr lang="en-US" sz="1100" dirty="0">
+              <a:rPr lang="en-US" sz="1100">
                 <a:solidFill>
                   <a:srgbClr val="64748B"/>
                 </a:solidFill>
@@ -2789,7 +2833,7 @@
               </a:rPr>
               <a:t>Join 4 CSV files into one clean master dataset</a:t>
             </a:r>
-            <a:endParaRPr lang="en-US" sz="1100" dirty="0"/>
+            <a:endParaRPr lang="en-US" sz="1100"/>
           </a:p>
         </p:txBody>
       </p:sp>
@@ -2879,7 +2923,7 @@
               <a:buNone/>
             </a:pPr>
             <a:r>
-              <a:rPr lang="en-US" sz="2000" b="1" dirty="0">
+              <a:rPr lang="en-US" sz="2000" b="1">
                 <a:solidFill>
                   <a:srgbClr val="FFFFFF"/>
                 </a:solidFill>
@@ -2889,7 +2933,7 @@
               </a:rPr>
               <a:t>2</a:t>
             </a:r>
-            <a:endParaRPr lang="en-US" sz="2000" dirty="0"/>
+            <a:endParaRPr lang="en-US" sz="2000"/>
           </a:p>
         </p:txBody>
       </p:sp>
@@ -2918,7 +2962,7 @@
               <a:buNone/>
             </a:pPr>
             <a:r>
-              <a:rPr lang="en-US" sz="1300" b="1" dirty="0">
+              <a:rPr lang="en-US" sz="1300" b="1">
                 <a:solidFill>
                   <a:srgbClr val="0D1B2A"/>
                 </a:solidFill>
@@ -2928,7 +2972,7 @@
               </a:rPr>
               <a:t>Delay Calculator</a:t>
             </a:r>
-            <a:endParaRPr lang="en-US" sz="1300" dirty="0"/>
+            <a:endParaRPr lang="en-US" sz="1300"/>
           </a:p>
         </p:txBody>
       </p:sp>
@@ -2957,7 +3001,7 @@
               <a:buNone/>
             </a:pPr>
             <a:r>
-              <a:rPr lang="en-US" sz="1100" dirty="0">
+              <a:rPr lang="en-US" sz="1100">
                 <a:solidFill>
                   <a:srgbClr val="64748B"/>
                 </a:solidFill>
@@ -2967,7 +3011,7 @@
               </a:rPr>
               <a:t>Calculate Days_Difference and classify On Time / Late / Super Late</a:t>
             </a:r>
-            <a:endParaRPr lang="en-US" sz="1100" dirty="0"/>
+            <a:endParaRPr lang="en-US" sz="1100"/>
           </a:p>
         </p:txBody>
       </p:sp>
@@ -3057,7 +3101,7 @@
               <a:buNone/>
             </a:pPr>
             <a:r>
-              <a:rPr lang="en-US" sz="2000" b="1" dirty="0">
+              <a:rPr lang="en-US" sz="2000" b="1">
                 <a:solidFill>
                   <a:srgbClr val="FFFFFF"/>
                 </a:solidFill>
@@ -3067,7 +3111,7 @@
               </a:rPr>
               <a:t>3</a:t>
             </a:r>
-            <a:endParaRPr lang="en-US" sz="2000" dirty="0"/>
+            <a:endParaRPr lang="en-US" sz="2000"/>
           </a:p>
         </p:txBody>
       </p:sp>
@@ -3096,7 +3140,7 @@
               <a:buNone/>
             </a:pPr>
             <a:r>
-              <a:rPr lang="en-US" sz="1300" b="1" dirty="0">
+              <a:rPr lang="en-US" sz="1300" b="1">
                 <a:solidFill>
                   <a:srgbClr val="0D1B2A"/>
                 </a:solidFill>
@@ -3106,7 +3150,7 @@
               </a:rPr>
               <a:t>Geographic Map</a:t>
             </a:r>
-            <a:endParaRPr lang="en-US" sz="1300" dirty="0"/>
+            <a:endParaRPr lang="en-US" sz="1300"/>
           </a:p>
         </p:txBody>
       </p:sp>
@@ -3135,7 +3179,7 @@
               <a:buNone/>
             </a:pPr>
             <a:r>
-              <a:rPr lang="en-US" sz="1100" dirty="0">
+              <a:rPr lang="en-US" sz="1100">
                 <a:solidFill>
                   <a:srgbClr val="64748B"/>
                 </a:solidFill>
@@ -3145,7 +3189,7 @@
               </a:rPr>
               <a:t>Map late delivery rates across all 27 Brazilian states</a:t>
             </a:r>
-            <a:endParaRPr lang="en-US" sz="1100" dirty="0"/>
+            <a:endParaRPr lang="en-US" sz="1100"/>
           </a:p>
         </p:txBody>
       </p:sp>
@@ -3235,7 +3279,7 @@
               <a:buNone/>
             </a:pPr>
             <a:r>
-              <a:rPr lang="en-US" sz="2000" b="1" dirty="0">
+              <a:rPr lang="en-US" sz="2000" b="1">
                 <a:solidFill>
                   <a:srgbClr val="FFFFFF"/>
                 </a:solidFill>
@@ -3245,7 +3289,7 @@
               </a:rPr>
               <a:t>4</a:t>
             </a:r>
-            <a:endParaRPr lang="en-US" sz="2000" dirty="0"/>
+            <a:endParaRPr lang="en-US" sz="2000"/>
           </a:p>
         </p:txBody>
       </p:sp>
@@ -3274,7 +3318,7 @@
               <a:buNone/>
             </a:pPr>
             <a:r>
-              <a:rPr lang="en-US" sz="1300" b="1" dirty="0">
+              <a:rPr lang="en-US" sz="1300" b="1">
                 <a:solidFill>
                   <a:srgbClr val="0D1B2A"/>
                 </a:solidFill>
@@ -3284,7 +3328,7 @@
               </a:rPr>
               <a:t>Smoking Gun</a:t>
             </a:r>
-            <a:endParaRPr lang="en-US" sz="1300" dirty="0"/>
+            <a:endParaRPr lang="en-US" sz="1300"/>
           </a:p>
         </p:txBody>
       </p:sp>
@@ -3313,7 +3357,7 @@
               <a:buNone/>
             </a:pPr>
             <a:r>
-              <a:rPr lang="en-US" sz="1100" dirty="0">
+              <a:rPr lang="en-US" sz="1100">
                 <a:solidFill>
                   <a:srgbClr val="64748B"/>
                 </a:solidFill>
@@ -3323,7 +3367,7 @@
               </a:rPr>
               <a:t>Prove that late deliveries directly cause bad customer reviews</a:t>
             </a:r>
-            <a:endParaRPr lang="en-US" sz="1100" dirty="0"/>
+            <a:endParaRPr lang="en-US" sz="1100"/>
           </a:p>
         </p:txBody>
       </p:sp>
@@ -3413,7 +3457,7 @@
               <a:buNone/>
             </a:pPr>
             <a:r>
-              <a:rPr lang="en-US" sz="2000" b="1" dirty="0">
+              <a:rPr lang="en-US" sz="2000" b="1">
                 <a:solidFill>
                   <a:srgbClr val="FFFFFF"/>
                 </a:solidFill>
@@ -3423,7 +3467,7 @@
               </a:rPr>
               <a:t>5</a:t>
             </a:r>
-            <a:endParaRPr lang="en-US" sz="2000" dirty="0"/>
+            <a:endParaRPr lang="en-US" sz="2000"/>
           </a:p>
         </p:txBody>
       </p:sp>
@@ -3452,7 +3496,7 @@
               <a:buNone/>
             </a:pPr>
             <a:r>
-              <a:rPr lang="en-US" sz="1300" b="1" dirty="0">
+              <a:rPr lang="en-US" sz="1300" b="1">
                 <a:solidFill>
                   <a:srgbClr val="0D1B2A"/>
                 </a:solidFill>
@@ -3462,7 +3506,7 @@
               </a:rPr>
               <a:t>Translation</a:t>
             </a:r>
-            <a:endParaRPr lang="en-US" sz="1300" dirty="0"/>
+            <a:endParaRPr lang="en-US" sz="1300"/>
           </a:p>
         </p:txBody>
       </p:sp>
@@ -3491,7 +3535,7 @@
               <a:buNone/>
             </a:pPr>
             <a:r>
-              <a:rPr lang="en-US" sz="1100" dirty="0">
+              <a:rPr lang="en-US" sz="1100">
                 <a:solidFill>
                   <a:srgbClr val="64748B"/>
                 </a:solidFill>
@@ -3501,7 +3545,7 @@
               </a:rPr>
               <a:t>Translate product categories from Portuguese to English</a:t>
             </a:r>
-            <a:endParaRPr lang="en-US" sz="1100" dirty="0"/>
+            <a:endParaRPr lang="en-US" sz="1100"/>
           </a:p>
         </p:txBody>
       </p:sp>
@@ -3596,10 +3640,8 @@
                   <a:srgbClr val="FFFFFF"/>
                 </a:solidFill>
                 <a:latin typeface="Arial Black" pitchFamily="34" charset="0"/>
-                <a:ea typeface="Arial Black" pitchFamily="34" charset="-122"/>
-                <a:cs typeface="Arial Black" pitchFamily="34" charset="-120"/>
-              </a:rPr>
-              <a:t>C</a:t>
+              </a:rPr>
+              <a:t>6</a:t>
             </a:r>
             <a:endParaRPr lang="en-US" sz="2000" dirty="0"/>
           </a:p>
@@ -3630,7 +3672,7 @@
               <a:buNone/>
             </a:pPr>
             <a:r>
-              <a:rPr lang="en-US" sz="1300" b="1" dirty="0">
+              <a:rPr lang="en-US" sz="1300" b="1">
                 <a:solidFill>
                   <a:srgbClr val="0D1B2A"/>
                 </a:solidFill>
@@ -3640,7 +3682,7 @@
               </a:rPr>
               <a:t>Monthly Trend</a:t>
             </a:r>
-            <a:endParaRPr lang="en-US" sz="1300" dirty="0"/>
+            <a:endParaRPr lang="en-US" sz="1300"/>
           </a:p>
         </p:txBody>
       </p:sp>
@@ -3669,7 +3711,7 @@
               <a:buNone/>
             </a:pPr>
             <a:r>
-              <a:rPr lang="en-US" sz="1100" dirty="0">
+              <a:rPr lang="en-US" sz="1100">
                 <a:solidFill>
                   <a:srgbClr val="64748B"/>
                 </a:solidFill>
@@ -3679,7 +3721,7 @@
               </a:rPr>
               <a:t>Show whether the problem is getting better or worse over time</a:t>
             </a:r>
-            <a:endParaRPr lang="en-US" sz="1100" dirty="0"/>
+            <a:endParaRPr lang="en-US" sz="1100"/>
           </a:p>
         </p:txBody>
       </p:sp>
@@ -3768,7 +3810,7 @@
               <a:buNone/>
             </a:pPr>
             <a:r>
-              <a:rPr lang="en-US" sz="1800" b="1" kern="0" spc="200" dirty="0">
+              <a:rPr lang="en-US" sz="1800" b="1" kern="0" spc="200">
                 <a:solidFill>
                   <a:srgbClr val="FFFFFF"/>
                 </a:solidFill>
@@ -3778,7 +3820,7 @@
               </a:rPr>
               <a:t>DELIVERY PERFORMANCE OVERVIEW</a:t>
             </a:r>
-            <a:endParaRPr lang="en-US" sz="1800" dirty="0"/>
+            <a:endParaRPr lang="en-US" sz="1800"/>
           </a:p>
         </p:txBody>
       </p:sp>
@@ -3807,7 +3849,7 @@
               <a:buNone/>
             </a:pPr>
             <a:r>
-              <a:rPr lang="en-US" sz="1300" b="1" dirty="0">
+              <a:rPr lang="en-US" sz="1300" b="1">
                 <a:solidFill>
                   <a:srgbClr val="2D6FA6"/>
                 </a:solidFill>
@@ -3817,7 +3859,7 @@
               </a:rPr>
               <a:t> Findings</a:t>
             </a:r>
-            <a:endParaRPr lang="en-US" sz="1300" dirty="0"/>
+            <a:endParaRPr lang="en-US" sz="1300"/>
           </a:p>
         </p:txBody>
       </p:sp>
@@ -3907,7 +3949,7 @@
               <a:buNone/>
             </a:pPr>
             <a:r>
-              <a:rPr lang="en-US" sz="1000" b="1" kern="0" spc="100" dirty="0">
+              <a:rPr lang="en-US" sz="1000" b="1" kern="0" spc="100">
                 <a:solidFill>
                   <a:srgbClr val="64748B"/>
                 </a:solidFill>
@@ -3917,7 +3959,7 @@
               </a:rPr>
               <a:t>TOTAL ORDERS</a:t>
             </a:r>
-            <a:endParaRPr lang="en-US" sz="1000" dirty="0"/>
+            <a:endParaRPr lang="en-US" sz="1000"/>
           </a:p>
         </p:txBody>
       </p:sp>
@@ -3946,7 +3988,7 @@
               <a:buNone/>
             </a:pPr>
             <a:r>
-              <a:rPr lang="en-US" sz="3000" b="1" dirty="0">
+              <a:rPr lang="en-US" sz="3000" b="1">
                 <a:solidFill>
                   <a:srgbClr val="1A3A5C"/>
                 </a:solidFill>
@@ -3956,7 +3998,7 @@
               </a:rPr>
               <a:t>98,207</a:t>
             </a:r>
-            <a:endParaRPr lang="en-US" sz="3000" dirty="0"/>
+            <a:endParaRPr lang="en-US" sz="3000"/>
           </a:p>
         </p:txBody>
       </p:sp>
@@ -3985,7 +4027,7 @@
               <a:buNone/>
             </a:pPr>
             <a:r>
-              <a:rPr lang="en-US" sz="1000" dirty="0">
+              <a:rPr lang="en-US" sz="1000">
                 <a:solidFill>
                   <a:srgbClr val="64748B"/>
                 </a:solidFill>
@@ -3995,7 +4037,7 @@
               </a:rPr>
               <a:t>All delivered orders</a:t>
             </a:r>
-            <a:endParaRPr lang="en-US" sz="1000" dirty="0"/>
+            <a:endParaRPr lang="en-US" sz="1000"/>
           </a:p>
         </p:txBody>
       </p:sp>
@@ -4085,7 +4127,7 @@
               <a:buNone/>
             </a:pPr>
             <a:r>
-              <a:rPr lang="en-US" sz="1000" b="1" kern="0" spc="100" dirty="0">
+              <a:rPr lang="en-US" sz="1000" b="1" kern="0" spc="100">
                 <a:solidFill>
                   <a:srgbClr val="64748B"/>
                 </a:solidFill>
@@ -4095,7 +4137,7 @@
               </a:rPr>
               <a:t>ON TIME</a:t>
             </a:r>
-            <a:endParaRPr lang="en-US" sz="1000" dirty="0"/>
+            <a:endParaRPr lang="en-US" sz="1000"/>
           </a:p>
         </p:txBody>
       </p:sp>
@@ -4124,7 +4166,7 @@
               <a:buNone/>
             </a:pPr>
             <a:r>
-              <a:rPr lang="en-US" sz="3000" b="1" dirty="0">
+              <a:rPr lang="en-US" sz="3000" b="1">
                 <a:solidFill>
                   <a:srgbClr val="27AE60"/>
                 </a:solidFill>
@@ -4134,7 +4176,7 @@
               </a:rPr>
               <a:t>90.3%</a:t>
             </a:r>
-            <a:endParaRPr lang="en-US" sz="3000" dirty="0"/>
+            <a:endParaRPr lang="en-US" sz="3000"/>
           </a:p>
         </p:txBody>
       </p:sp>
@@ -4163,7 +4205,7 @@
               <a:buNone/>
             </a:pPr>
             <a:r>
-              <a:rPr lang="en-US" sz="1000" dirty="0">
+              <a:rPr lang="en-US" sz="1000">
                 <a:solidFill>
                   <a:srgbClr val="64748B"/>
                 </a:solidFill>
@@ -4173,7 +4215,7 @@
               </a:rPr>
               <a:t>88,644 orders</a:t>
             </a:r>
-            <a:endParaRPr lang="en-US" sz="1000" dirty="0"/>
+            <a:endParaRPr lang="en-US" sz="1000"/>
           </a:p>
         </p:txBody>
       </p:sp>
@@ -4263,7 +4305,7 @@
               <a:buNone/>
             </a:pPr>
             <a:r>
-              <a:rPr lang="en-US" sz="1000" b="1" kern="0" spc="100" dirty="0">
+              <a:rPr lang="en-US" sz="1000" b="1" kern="0" spc="100">
                 <a:solidFill>
                   <a:srgbClr val="64748B"/>
                 </a:solidFill>
@@ -4273,7 +4315,7 @@
               </a:rPr>
               <a:t>LATE</a:t>
             </a:r>
-            <a:endParaRPr lang="en-US" sz="1000" dirty="0"/>
+            <a:endParaRPr lang="en-US" sz="1000"/>
           </a:p>
         </p:txBody>
       </p:sp>
@@ -4302,7 +4344,7 @@
               <a:buNone/>
             </a:pPr>
             <a:r>
-              <a:rPr lang="en-US" sz="3000" b="1" dirty="0">
+              <a:rPr lang="en-US" sz="3000" b="1">
                 <a:solidFill>
                   <a:srgbClr val="F39C12"/>
                 </a:solidFill>
@@ -4312,7 +4354,7 @@
               </a:rPr>
               <a:t>3.7%</a:t>
             </a:r>
-            <a:endParaRPr lang="en-US" sz="3000" dirty="0"/>
+            <a:endParaRPr lang="en-US" sz="3000"/>
           </a:p>
         </p:txBody>
       </p:sp>
@@ -4341,7 +4383,7 @@
               <a:buNone/>
             </a:pPr>
             <a:r>
-              <a:rPr lang="en-US" sz="1000" dirty="0">
+              <a:rPr lang="en-US" sz="1000">
                 <a:solidFill>
                   <a:srgbClr val="64748B"/>
                 </a:solidFill>
@@ -4351,7 +4393,7 @@
               </a:rPr>
               <a:t>3,615 orders</a:t>
             </a:r>
-            <a:endParaRPr lang="en-US" sz="1000" dirty="0"/>
+            <a:endParaRPr lang="en-US" sz="1000"/>
           </a:p>
         </p:txBody>
       </p:sp>
@@ -4441,7 +4483,7 @@
               <a:buNone/>
             </a:pPr>
             <a:r>
-              <a:rPr lang="en-US" sz="1000" b="1" kern="0" spc="100" dirty="0">
+              <a:rPr lang="en-US" sz="1000" b="1" kern="0" spc="100">
                 <a:solidFill>
                   <a:srgbClr val="64748B"/>
                 </a:solidFill>
@@ -4451,7 +4493,7 @@
               </a:rPr>
               <a:t>SUPER LATE</a:t>
             </a:r>
-            <a:endParaRPr lang="en-US" sz="1000" dirty="0"/>
+            <a:endParaRPr lang="en-US" sz="1000"/>
           </a:p>
         </p:txBody>
       </p:sp>
@@ -4480,7 +4522,7 @@
               <a:buNone/>
             </a:pPr>
             <a:r>
-              <a:rPr lang="en-US" sz="3000" b="1" dirty="0">
+              <a:rPr lang="en-US" sz="3000" b="1">
                 <a:solidFill>
                   <a:srgbClr val="E74C3C"/>
                 </a:solidFill>
@@ -4490,7 +4532,7 @@
               </a:rPr>
               <a:t>4.3%</a:t>
             </a:r>
-            <a:endParaRPr lang="en-US" sz="3000" dirty="0"/>
+            <a:endParaRPr lang="en-US" sz="3000"/>
           </a:p>
         </p:txBody>
       </p:sp>
@@ -4519,7 +4561,7 @@
               <a:buNone/>
             </a:pPr>
             <a:r>
-              <a:rPr lang="en-US" sz="1000" dirty="0">
+              <a:rPr lang="en-US" sz="1000">
                 <a:solidFill>
                   <a:srgbClr val="64748B"/>
                 </a:solidFill>
@@ -4529,7 +4571,7 @@
               </a:rPr>
               <a:t>4,211 orders</a:t>
             </a:r>
-            <a:endParaRPr lang="en-US" sz="1000" dirty="0"/>
+            <a:endParaRPr lang="en-US" sz="1000"/>
           </a:p>
         </p:txBody>
       </p:sp>
@@ -4617,7 +4659,7 @@
               <a:buNone/>
             </a:pPr>
             <a:r>
-              <a:rPr lang="en-US" sz="1300" b="1" dirty="0">
+              <a:rPr lang="en-US" sz="1300" b="1">
                 <a:solidFill>
                   <a:srgbClr val="E74C3C"/>
                 </a:solidFill>
@@ -4627,7 +4669,7 @@
               </a:rPr>
               <a:t>Key Insight</a:t>
             </a:r>
-            <a:endParaRPr lang="en-US" sz="1300" dirty="0"/>
+            <a:endParaRPr lang="en-US" sz="1300"/>
           </a:p>
         </p:txBody>
       </p:sp>
@@ -4656,7 +4698,7 @@
               <a:buNone/>
             </a:pPr>
             <a:r>
-              <a:rPr lang="en-US" sz="1200" dirty="0">
+              <a:rPr lang="en-US" sz="1200">
                 <a:solidFill>
                   <a:srgbClr val="555555"/>
                 </a:solidFill>
@@ -4666,7 +4708,7 @@
               </a:rPr>
               <a:t>While 90.3% of orders arrive on time, the remaining 8% represent nearly 8,000 customers who received packages significantly later than promised. Super Late (4.3%) exceeds Late (3.7%) , meaning when Veridi fails, they fail badly, not just by a day or two.</a:t>
             </a:r>
-            <a:endParaRPr lang="en-US" sz="1200" dirty="0"/>
+            <a:endParaRPr lang="en-US" sz="1200"/>
           </a:p>
         </p:txBody>
       </p:sp>
@@ -4755,7 +4797,7 @@
               <a:buNone/>
             </a:pPr>
             <a:r>
-              <a:rPr lang="en-US" sz="1800" b="1" kern="0" spc="200" dirty="0">
+              <a:rPr lang="en-US" sz="1800" b="1" kern="0" spc="200">
                 <a:solidFill>
                   <a:srgbClr val="FFFFFF"/>
                 </a:solidFill>
@@ -4765,7 +4807,7 @@
               </a:rPr>
               <a:t>IT IS A REGIONAL PROBLEM</a:t>
             </a:r>
-            <a:endParaRPr lang="en-US" sz="1800" dirty="0"/>
+            <a:endParaRPr lang="en-US" sz="1800"/>
           </a:p>
         </p:txBody>
       </p:sp>
@@ -4794,7 +4836,7 @@
               <a:buNone/>
             </a:pPr>
             <a:r>
-              <a:rPr lang="en-US" sz="1300" b="1" dirty="0">
+              <a:rPr lang="en-US" sz="1300" b="1">
                 <a:solidFill>
                   <a:srgbClr val="2D6FA6"/>
                 </a:solidFill>
@@ -4804,7 +4846,7 @@
               </a:rPr>
               <a:t>Late delivery rates mapped across all 27 Brazilian states</a:t>
             </a:r>
-            <a:endParaRPr lang="en-US" sz="1300" dirty="0"/>
+            <a:endParaRPr lang="en-US" sz="1300"/>
           </a:p>
         </p:txBody>
       </p:sp>
@@ -4833,7 +4875,7 @@
               <a:buNone/>
             </a:pPr>
             <a:r>
-              <a:rPr lang="en-US" sz="1200" b="1" dirty="0">
+              <a:rPr lang="en-US" sz="1200" b="1">
                 <a:solidFill>
                   <a:srgbClr val="0D1B2A"/>
                 </a:solidFill>
@@ -4843,7 +4885,7 @@
               </a:rPr>
               <a:t>AL — Alagoas</a:t>
             </a:r>
-            <a:endParaRPr lang="en-US" sz="1200" dirty="0"/>
+            <a:endParaRPr lang="en-US" sz="1200"/>
           </a:p>
         </p:txBody>
       </p:sp>
@@ -4899,7 +4941,7 @@
               <a:buNone/>
             </a:pPr>
             <a:r>
-              <a:rPr lang="en-US" sz="1200" b="1" dirty="0">
+              <a:rPr lang="en-US" sz="1200" b="1">
                 <a:solidFill>
                   <a:srgbClr val="E74C3C"/>
                 </a:solidFill>
@@ -4909,7 +4951,7 @@
               </a:rPr>
               <a:t>23.1%</a:t>
             </a:r>
-            <a:endParaRPr lang="en-US" sz="1200" dirty="0"/>
+            <a:endParaRPr lang="en-US" sz="1200"/>
           </a:p>
         </p:txBody>
       </p:sp>
@@ -4938,7 +4980,7 @@
               <a:buNone/>
             </a:pPr>
             <a:r>
-              <a:rPr lang="en-US" sz="1200" b="1" dirty="0">
+              <a:rPr lang="en-US" sz="1200" b="1">
                 <a:solidFill>
                   <a:srgbClr val="0D1B2A"/>
                 </a:solidFill>
@@ -4948,7 +4990,7 @@
               </a:rPr>
               <a:t>MA — Maranhao</a:t>
             </a:r>
-            <a:endParaRPr lang="en-US" sz="1200" dirty="0"/>
+            <a:endParaRPr lang="en-US" sz="1200"/>
           </a:p>
         </p:txBody>
       </p:sp>
@@ -5004,7 +5046,7 @@
               <a:buNone/>
             </a:pPr>
             <a:r>
-              <a:rPr lang="en-US" sz="1200" b="1" dirty="0">
+              <a:rPr lang="en-US" sz="1200" b="1">
                 <a:solidFill>
                   <a:srgbClr val="E74C3C"/>
                 </a:solidFill>
@@ -5014,7 +5056,7 @@
               </a:rPr>
               <a:t>19.2%</a:t>
             </a:r>
-            <a:endParaRPr lang="en-US" sz="1200" dirty="0"/>
+            <a:endParaRPr lang="en-US" sz="1200"/>
           </a:p>
         </p:txBody>
       </p:sp>
@@ -5043,7 +5085,7 @@
               <a:buNone/>
             </a:pPr>
             <a:r>
-              <a:rPr lang="en-US" sz="1200" b="1" dirty="0">
+              <a:rPr lang="en-US" sz="1200" b="1">
                 <a:solidFill>
                   <a:srgbClr val="0D1B2A"/>
                 </a:solidFill>
@@ -5053,7 +5095,7 @@
               </a:rPr>
               <a:t>PI — Piaui</a:t>
             </a:r>
-            <a:endParaRPr lang="en-US" sz="1200" dirty="0"/>
+            <a:endParaRPr lang="en-US" sz="1200"/>
           </a:p>
         </p:txBody>
       </p:sp>
@@ -5109,7 +5151,7 @@
               <a:buNone/>
             </a:pPr>
             <a:r>
-              <a:rPr lang="en-US" sz="1200" b="1" dirty="0">
+              <a:rPr lang="en-US" sz="1200" b="1">
                 <a:solidFill>
                   <a:srgbClr val="E74C3C"/>
                 </a:solidFill>
@@ -5119,7 +5161,7 @@
               </a:rPr>
               <a:t>15.5%</a:t>
             </a:r>
-            <a:endParaRPr lang="en-US" sz="1200" dirty="0"/>
+            <a:endParaRPr lang="en-US" sz="1200"/>
           </a:p>
         </p:txBody>
       </p:sp>
@@ -5148,7 +5190,7 @@
               <a:buNone/>
             </a:pPr>
             <a:r>
-              <a:rPr lang="en-US" sz="1200" b="1" dirty="0">
+              <a:rPr lang="en-US" sz="1200" b="1">
                 <a:solidFill>
                   <a:srgbClr val="0D1B2A"/>
                 </a:solidFill>
@@ -5158,7 +5200,7 @@
               </a:rPr>
               <a:t>CE — Ceara</a:t>
             </a:r>
-            <a:endParaRPr lang="en-US" sz="1200" dirty="0"/>
+            <a:endParaRPr lang="en-US" sz="1200"/>
           </a:p>
         </p:txBody>
       </p:sp>
@@ -5214,7 +5256,7 @@
               <a:buNone/>
             </a:pPr>
             <a:r>
-              <a:rPr lang="en-US" sz="1200" b="1" dirty="0">
+              <a:rPr lang="en-US" sz="1200" b="1">
                 <a:solidFill>
                   <a:srgbClr val="F39C12"/>
                 </a:solidFill>
@@ -5224,7 +5266,7 @@
               </a:rPr>
               <a:t>14.8%</a:t>
             </a:r>
-            <a:endParaRPr lang="en-US" sz="1200" dirty="0"/>
+            <a:endParaRPr lang="en-US" sz="1200"/>
           </a:p>
         </p:txBody>
       </p:sp>
@@ -5253,7 +5295,7 @@
               <a:buNone/>
             </a:pPr>
             <a:r>
-              <a:rPr lang="en-US" sz="1200" b="1" dirty="0">
+              <a:rPr lang="en-US" sz="1200" b="1">
                 <a:solidFill>
                   <a:srgbClr val="0D1B2A"/>
                 </a:solidFill>
@@ -5263,7 +5305,7 @@
               </a:rPr>
               <a:t>SE — Sergipe</a:t>
             </a:r>
-            <a:endParaRPr lang="en-US" sz="1200" dirty="0"/>
+            <a:endParaRPr lang="en-US" sz="1200"/>
           </a:p>
         </p:txBody>
       </p:sp>
@@ -5319,7 +5361,7 @@
               <a:buNone/>
             </a:pPr>
             <a:r>
-              <a:rPr lang="en-US" sz="1200" b="1" dirty="0">
+              <a:rPr lang="en-US" sz="1200" b="1">
                 <a:solidFill>
                   <a:srgbClr val="F39C12"/>
                 </a:solidFill>
@@ -5329,7 +5371,7 @@
               </a:rPr>
               <a:t>14.8%</a:t>
             </a:r>
-            <a:endParaRPr lang="en-US" sz="1200" dirty="0"/>
+            <a:endParaRPr lang="en-US" sz="1200"/>
           </a:p>
         </p:txBody>
       </p:sp>
@@ -5358,7 +5400,7 @@
               <a:buNone/>
             </a:pPr>
             <a:r>
-              <a:rPr lang="en-US" sz="1200" b="1" dirty="0">
+              <a:rPr lang="en-US" sz="1200" b="1">
                 <a:solidFill>
                   <a:srgbClr val="0D1B2A"/>
                 </a:solidFill>
@@ -5368,7 +5410,7 @@
               </a:rPr>
               <a:t>SP — Sao Paulo</a:t>
             </a:r>
-            <a:endParaRPr lang="en-US" sz="1200" dirty="0"/>
+            <a:endParaRPr lang="en-US" sz="1200"/>
           </a:p>
         </p:txBody>
       </p:sp>
@@ -5424,7 +5466,7 @@
               <a:buNone/>
             </a:pPr>
             <a:r>
-              <a:rPr lang="en-US" sz="1200" b="1" dirty="0">
+              <a:rPr lang="en-US" sz="1200" b="1">
                 <a:solidFill>
                   <a:srgbClr val="27AE60"/>
                 </a:solidFill>
@@ -5434,7 +5476,7 @@
               </a:rPr>
               <a:t>4.5%</a:t>
             </a:r>
-            <a:endParaRPr lang="en-US" sz="1200" dirty="0"/>
+            <a:endParaRPr lang="en-US" sz="1200"/>
           </a:p>
         </p:txBody>
       </p:sp>
@@ -5463,7 +5505,7 @@
               <a:buNone/>
             </a:pPr>
             <a:r>
-              <a:rPr lang="en-US" sz="1200" b="1" dirty="0">
+              <a:rPr lang="en-US" sz="1200" b="1">
                 <a:solidFill>
                   <a:srgbClr val="0D1B2A"/>
                 </a:solidFill>
@@ -5473,7 +5515,7 @@
               </a:rPr>
               <a:t>MG — Minas Gerais</a:t>
             </a:r>
-            <a:endParaRPr lang="en-US" sz="1200" dirty="0"/>
+            <a:endParaRPr lang="en-US" sz="1200"/>
           </a:p>
         </p:txBody>
       </p:sp>
@@ -5529,7 +5571,7 @@
               <a:buNone/>
             </a:pPr>
             <a:r>
-              <a:rPr lang="en-US" sz="1200" b="1" dirty="0">
+              <a:rPr lang="en-US" sz="1200" b="1">
                 <a:solidFill>
                   <a:srgbClr val="27AE60"/>
                 </a:solidFill>
@@ -5539,7 +5581,7 @@
               </a:rPr>
               <a:t>3.2%</a:t>
             </a:r>
-            <a:endParaRPr lang="en-US" sz="1200" dirty="0"/>
+            <a:endParaRPr lang="en-US" sz="1200"/>
           </a:p>
         </p:txBody>
       </p:sp>
@@ -5595,7 +5637,7 @@
               <a:buNone/>
             </a:pPr>
             <a:r>
-              <a:rPr lang="en-US" sz="1100" b="1" dirty="0">
+              <a:rPr lang="en-US" sz="1100" b="1">
                 <a:solidFill>
                   <a:srgbClr val="1A3A5C"/>
                 </a:solidFill>
@@ -5605,7 +5647,7 @@
               </a:rPr>
               <a:t>All critical states (AL, MA, PI) are in Brazil's northeast ,furthest from Sao Paulo's main distribution centers. This is a regional, not nationwide, problem.</a:t>
             </a:r>
-            <a:endParaRPr lang="en-US" sz="1100" dirty="0"/>
+            <a:endParaRPr lang="en-US" sz="1100"/>
           </a:p>
         </p:txBody>
       </p:sp>
@@ -5694,7 +5736,7 @@
               <a:buNone/>
             </a:pPr>
             <a:r>
-              <a:rPr lang="en-US" sz="1800" b="1" kern="0" spc="200" dirty="0">
+              <a:rPr lang="en-US" sz="1800" b="1" kern="0" spc="200">
                 <a:solidFill>
                   <a:srgbClr val="FFFFFF"/>
                 </a:solidFill>
@@ -5704,7 +5746,7 @@
               </a:rPr>
               <a:t>THE SMOKING GUN</a:t>
             </a:r>
-            <a:endParaRPr lang="en-US" sz="1800" dirty="0"/>
+            <a:endParaRPr lang="en-US" sz="1800"/>
           </a:p>
         </p:txBody>
       </p:sp>
@@ -5741,7 +5783,7 @@
                 <a:ea typeface="Arial" pitchFamily="34" charset="-122"/>
                 <a:cs typeface="Arial" pitchFamily="34" charset="-120"/>
               </a:rPr>
-              <a:t>Sprint 4 Finding — Late deliveries directly cause bad customer reviews</a:t>
+              <a:t>Sprint 4 Finding - Late deliveries directly cause bad customer reviews</a:t>
             </a:r>
             <a:endParaRPr lang="en-US" sz="1300" dirty="0"/>
           </a:p>
@@ -5772,7 +5814,7 @@
               <a:buNone/>
             </a:pPr>
             <a:r>
-              <a:rPr lang="en-US" sz="1400" b="1" dirty="0">
+              <a:rPr lang="en-US" sz="1400" b="1">
                 <a:solidFill>
                   <a:srgbClr val="0D1B2A"/>
                 </a:solidFill>
@@ -5782,7 +5824,7 @@
               </a:rPr>
               <a:t>On Time</a:t>
             </a:r>
-            <a:endParaRPr lang="en-US" sz="1400" dirty="0"/>
+            <a:endParaRPr lang="en-US" sz="1400"/>
           </a:p>
         </p:txBody>
       </p:sp>
@@ -5838,7 +5880,7 @@
               <a:buNone/>
             </a:pPr>
             <a:r>
-              <a:rPr lang="en-US" sz="1400" b="1" dirty="0">
+              <a:rPr lang="en-US" sz="1400" b="1">
                 <a:solidFill>
                   <a:srgbClr val="27AE60"/>
                 </a:solidFill>
@@ -5848,7 +5890,7 @@
               </a:rPr>
               <a:t>4.29 / 5</a:t>
             </a:r>
-            <a:endParaRPr lang="en-US" sz="1400" dirty="0"/>
+            <a:endParaRPr lang="en-US" sz="1400"/>
           </a:p>
         </p:txBody>
       </p:sp>
@@ -5876,7 +5918,7 @@
             <a:pPr marL="0" indent="0">
               <a:buNone/>
             </a:pPr>
-            <a:endParaRPr lang="en-US" sz="1400" dirty="0"/>
+            <a:endParaRPr lang="en-US" sz="1400"/>
           </a:p>
         </p:txBody>
       </p:sp>
@@ -5935,7 +5977,7 @@
               <a:buNone/>
             </a:pPr>
             <a:r>
-              <a:rPr lang="en-US" sz="1400" b="1" dirty="0">
+              <a:rPr lang="en-US" sz="1400" b="1">
                 <a:solidFill>
                   <a:srgbClr val="0D1B2A"/>
                 </a:solidFill>
@@ -5945,7 +5987,7 @@
               </a:rPr>
               <a:t>Late</a:t>
             </a:r>
-            <a:endParaRPr lang="en-US" sz="1400" dirty="0"/>
+            <a:endParaRPr lang="en-US" sz="1400"/>
           </a:p>
         </p:txBody>
       </p:sp>
@@ -6001,7 +6043,7 @@
               <a:buNone/>
             </a:pPr>
             <a:r>
-              <a:rPr lang="en-US" sz="1400" b="1" dirty="0">
+              <a:rPr lang="en-US" sz="1400" b="1">
                 <a:solidFill>
                   <a:srgbClr val="F39C12"/>
                 </a:solidFill>
@@ -6011,7 +6053,7 @@
               </a:rPr>
               <a:t>3.46 / 5</a:t>
             </a:r>
-            <a:endParaRPr lang="en-US" sz="1400" dirty="0"/>
+            <a:endParaRPr lang="en-US" sz="1400"/>
           </a:p>
         </p:txBody>
       </p:sp>
@@ -6039,7 +6081,7 @@
             <a:pPr marL="0" indent="0">
               <a:buNone/>
             </a:pPr>
-            <a:endParaRPr lang="en-US" sz="1400" dirty="0"/>
+            <a:endParaRPr lang="en-US" sz="1400"/>
           </a:p>
         </p:txBody>
       </p:sp>
@@ -6098,7 +6140,7 @@
               <a:buNone/>
             </a:pPr>
             <a:r>
-              <a:rPr lang="en-US" sz="1400" b="1" dirty="0">
+              <a:rPr lang="en-US" sz="1400" b="1">
                 <a:solidFill>
                   <a:srgbClr val="0D1B2A"/>
                 </a:solidFill>
@@ -6108,7 +6150,7 @@
               </a:rPr>
               <a:t>Super Late</a:t>
             </a:r>
-            <a:endParaRPr lang="en-US" sz="1400" dirty="0"/>
+            <a:endParaRPr lang="en-US" sz="1400"/>
           </a:p>
         </p:txBody>
       </p:sp>
@@ -6164,7 +6206,7 @@
               <a:buNone/>
             </a:pPr>
             <a:r>
-              <a:rPr lang="en-US" sz="1400" b="1" dirty="0">
+              <a:rPr lang="en-US" sz="1400" b="1">
                 <a:solidFill>
                   <a:srgbClr val="E74C3C"/>
                 </a:solidFill>
@@ -6174,7 +6216,7 @@
               </a:rPr>
               <a:t>1.78 / 5</a:t>
             </a:r>
-            <a:endParaRPr lang="en-US" sz="1400" dirty="0"/>
+            <a:endParaRPr lang="en-US" sz="1400"/>
           </a:p>
         </p:txBody>
       </p:sp>
@@ -6202,7 +6244,7 @@
             <a:pPr marL="0" indent="0">
               <a:buNone/>
             </a:pPr>
-            <a:endParaRPr lang="en-US" sz="1400" dirty="0"/>
+            <a:endParaRPr lang="en-US" sz="1400"/>
           </a:p>
         </p:txBody>
       </p:sp>
@@ -6293,7 +6335,7 @@
               <a:buNone/>
             </a:pPr>
             <a:r>
-              <a:rPr lang="en-US" sz="1200" b="1" dirty="0">
+              <a:rPr lang="en-US" sz="1200" b="1">
                 <a:solidFill>
                   <a:srgbClr val="E74C3C"/>
                 </a:solidFill>
@@ -6304,7 +6346,7 @@
               <a:t>A 2.51 point drop from On Time to Super Late proves logistics failure  not product quality or seller </a:t>
             </a:r>
             <a:r>
-              <a:rPr lang="en-US" sz="1200" b="1" dirty="0" err="1">
+              <a:rPr lang="en-US" sz="1200" b="1" err="1">
                 <a:solidFill>
                   <a:srgbClr val="E74C3C"/>
                 </a:solidFill>
@@ -6315,7 +6357,7 @@
               <a:t>behaviour</a:t>
             </a:r>
             <a:r>
-              <a:rPr lang="en-US" sz="1200" b="1" dirty="0">
+              <a:rPr lang="en-US" sz="1200" b="1">
                 <a:solidFill>
                   <a:srgbClr val="E74C3C"/>
                 </a:solidFill>
@@ -6325,7 +6367,7 @@
               </a:rPr>
               <a:t>  is driving negative reviews.</a:t>
             </a:r>
-            <a:endParaRPr lang="en-US" sz="1200" dirty="0"/>
+            <a:endParaRPr lang="en-US" sz="1200"/>
           </a:p>
         </p:txBody>
       </p:sp>
@@ -6414,7 +6456,7 @@
               <a:buNone/>
             </a:pPr>
             <a:r>
-              <a:rPr lang="en-US" sz="1800" b="1" kern="0" spc="200" dirty="0">
+              <a:rPr lang="en-US" sz="1800" b="1" kern="0" spc="200">
                 <a:solidFill>
                   <a:srgbClr val="FFFFFF"/>
                 </a:solidFill>
@@ -6424,7 +6466,7 @@
               </a:rPr>
               <a:t>THE PROBLEM IS GETTING WORSE</a:t>
             </a:r>
-            <a:endParaRPr lang="en-US" sz="1800" dirty="0"/>
+            <a:endParaRPr lang="en-US" sz="1800"/>
           </a:p>
         </p:txBody>
       </p:sp>
@@ -6453,7 +6495,7 @@
               <a:buNone/>
             </a:pPr>
             <a:r>
-              <a:rPr lang="en-US" sz="1300" b="1" dirty="0">
+              <a:rPr lang="en-US" sz="1300" b="1">
                 <a:solidFill>
                   <a:srgbClr val="2D6FA6"/>
                 </a:solidFill>
@@ -6463,7 +6505,7 @@
               </a:rPr>
               <a:t>Candidate's Choice — Monthly late delivery rate trend analysis</a:t>
             </a:r>
-            <a:endParaRPr lang="en-US" sz="1300" dirty="0"/>
+            <a:endParaRPr lang="en-US" sz="1300"/>
           </a:p>
         </p:txBody>
       </p:sp>
@@ -6569,7 +6611,7 @@
               <a:buNone/>
             </a:pPr>
             <a:r>
-              <a:rPr lang="en-US" sz="1600" b="1" dirty="0">
+              <a:rPr lang="en-US" sz="1600" b="1">
                 <a:solidFill>
                   <a:srgbClr val="FFFFFF"/>
                 </a:solidFill>
@@ -6579,7 +6621,7 @@
               </a:rPr>
               <a:t>↑</a:t>
             </a:r>
-            <a:endParaRPr lang="en-US" sz="1600" dirty="0"/>
+            <a:endParaRPr lang="en-US" sz="1600"/>
           </a:p>
         </p:txBody>
       </p:sp>
@@ -6608,7 +6650,7 @@
               <a:buNone/>
             </a:pPr>
             <a:r>
-              <a:rPr lang="en-US" sz="1200" dirty="0">
+              <a:rPr lang="en-US" sz="1200">
                 <a:solidFill>
                   <a:srgbClr val="0D1B2A"/>
                 </a:solidFill>
@@ -6618,7 +6660,7 @@
               </a:rPr>
               <a:t>Trend is WORSENING over time</a:t>
             </a:r>
-            <a:endParaRPr lang="en-US" sz="1200" dirty="0"/>
+            <a:endParaRPr lang="en-US" sz="1200"/>
           </a:p>
         </p:txBody>
       </p:sp>
@@ -6708,7 +6750,7 @@
               <a:buNone/>
             </a:pPr>
             <a:r>
-              <a:rPr lang="en-US" sz="1600" b="1" dirty="0">
+              <a:rPr lang="en-US" sz="1600" b="1">
                 <a:solidFill>
                   <a:srgbClr val="FFFFFF"/>
                 </a:solidFill>
@@ -6718,7 +6760,7 @@
               </a:rPr>
               <a:t>!</a:t>
             </a:r>
-            <a:endParaRPr lang="en-US" sz="1600" dirty="0"/>
+            <a:endParaRPr lang="en-US" sz="1600"/>
           </a:p>
         </p:txBody>
       </p:sp>
@@ -6747,7 +6789,7 @@
               <a:buNone/>
             </a:pPr>
             <a:r>
-              <a:rPr lang="en-US" sz="1200" dirty="0">
+              <a:rPr lang="en-US" sz="1200">
                 <a:solidFill>
                   <a:srgbClr val="0D1B2A"/>
                 </a:solidFill>
@@ -6757,7 +6799,7 @@
               </a:rPr>
               <a:t>More customers failed each month</a:t>
             </a:r>
-            <a:endParaRPr lang="en-US" sz="1200" dirty="0"/>
+            <a:endParaRPr lang="en-US" sz="1200"/>
           </a:p>
         </p:txBody>
       </p:sp>
@@ -6847,7 +6889,7 @@
               <a:buNone/>
             </a:pPr>
             <a:r>
-              <a:rPr lang="en-US" sz="1600" b="1" dirty="0">
+              <a:rPr lang="en-US" sz="1600" b="1">
                 <a:solidFill>
                   <a:srgbClr val="FFFFFF"/>
                 </a:solidFill>
@@ -6857,7 +6899,7 @@
               </a:rPr>
               <a:t>×</a:t>
             </a:r>
-            <a:endParaRPr lang="en-US" sz="1600" dirty="0"/>
+            <a:endParaRPr lang="en-US" sz="1600"/>
           </a:p>
         </p:txBody>
       </p:sp>
@@ -6886,7 +6928,7 @@
               <a:buNone/>
             </a:pPr>
             <a:r>
-              <a:rPr lang="en-US" sz="1200" dirty="0">
+              <a:rPr lang="en-US" sz="1200">
                 <a:solidFill>
                   <a:srgbClr val="0D1B2A"/>
                 </a:solidFill>
@@ -6896,7 +6938,7 @@
               </a:rPr>
               <a:t>Fewer repeat purchases expected</a:t>
             </a:r>
-            <a:endParaRPr lang="en-US" sz="1200" dirty="0"/>
+            <a:endParaRPr lang="en-US" sz="1200"/>
           </a:p>
         </p:txBody>
       </p:sp>
@@ -6986,7 +7028,7 @@
               <a:buNone/>
             </a:pPr>
             <a:r>
-              <a:rPr lang="en-US" sz="1600" b="1" dirty="0">
+              <a:rPr lang="en-US" sz="1600" b="1">
                 <a:solidFill>
                   <a:srgbClr val="FFFFFF"/>
                 </a:solidFill>
@@ -6996,7 +7038,7 @@
               </a:rPr>
               <a:t>↓</a:t>
             </a:r>
-            <a:endParaRPr lang="en-US" sz="1600" dirty="0"/>
+            <a:endParaRPr lang="en-US" sz="1600"/>
           </a:p>
         </p:txBody>
       </p:sp>
@@ -7025,7 +7067,7 @@
               <a:buNone/>
             </a:pPr>
             <a:r>
-              <a:rPr lang="en-US" sz="1200" dirty="0">
+              <a:rPr lang="en-US" sz="1200">
                 <a:solidFill>
                   <a:srgbClr val="0D1B2A"/>
                 </a:solidFill>
@@ -7035,7 +7077,7 @@
               </a:rPr>
               <a:t>Revenue decline risk increasing</a:t>
             </a:r>
-            <a:endParaRPr lang="en-US" sz="1200" dirty="0"/>
+            <a:endParaRPr lang="en-US" sz="1200"/>
           </a:p>
         </p:txBody>
       </p:sp>
@@ -7096,7 +7138,7 @@
               <a:buNone/>
             </a:pPr>
             <a:r>
-              <a:rPr lang="en-US" sz="1100" b="1" dirty="0">
+              <a:rPr lang="en-US" sz="1100" b="1">
                 <a:solidFill>
                   <a:srgbClr val="E74C3C"/>
                 </a:solidFill>
@@ -7106,7 +7148,7 @@
               </a:rPr>
               <a:t>Without urgent intervention, this compounds  each month more customers are failed, driving a cycle of bad reviews and lost revenue.</a:t>
             </a:r>
-            <a:endParaRPr lang="en-US" sz="1100" dirty="0"/>
+            <a:endParaRPr lang="en-US" sz="1100"/>
           </a:p>
         </p:txBody>
       </p:sp>
@@ -7195,7 +7237,7 @@
               <a:buNone/>
             </a:pPr>
             <a:r>
-              <a:rPr lang="en-US" sz="1800" b="1" kern="0" spc="200" dirty="0">
+              <a:rPr lang="en-US" sz="1800" b="1" kern="0" spc="200">
                 <a:solidFill>
                   <a:srgbClr val="FFFFFF"/>
                 </a:solidFill>
@@ -7205,7 +7247,7 @@
               </a:rPr>
               <a:t>RECOMMENDATIONS</a:t>
             </a:r>
-            <a:endParaRPr lang="en-US" sz="1800" dirty="0"/>
+            <a:endParaRPr lang="en-US" sz="1800"/>
           </a:p>
         </p:txBody>
       </p:sp>
@@ -7234,7 +7276,7 @@
               <a:buNone/>
             </a:pPr>
             <a:r>
-              <a:rPr lang="en-US" sz="1300" b="1" dirty="0">
+              <a:rPr lang="en-US" sz="1300" b="1">
                 <a:solidFill>
                   <a:srgbClr val="2D6FA6"/>
                 </a:solidFill>
@@ -7244,7 +7286,7 @@
               </a:rPr>
               <a:t>What Veridi Should Do Now</a:t>
             </a:r>
-            <a:endParaRPr lang="en-US" sz="1300" dirty="0"/>
+            <a:endParaRPr lang="en-US" sz="1300"/>
           </a:p>
         </p:txBody>
       </p:sp>
@@ -7334,7 +7376,7 @@
               <a:buNone/>
             </a:pPr>
             <a:r>
-              <a:rPr lang="en-US" sz="1800" b="1" dirty="0">
+              <a:rPr lang="en-US" sz="1800" b="1">
                 <a:solidFill>
                   <a:srgbClr val="FFFFFF"/>
                 </a:solidFill>
@@ -7344,7 +7386,7 @@
               </a:rPr>
               <a:t>1</a:t>
             </a:r>
-            <a:endParaRPr lang="en-US" sz="1800" dirty="0"/>
+            <a:endParaRPr lang="en-US" sz="1800"/>
           </a:p>
         </p:txBody>
       </p:sp>
@@ -7373,7 +7415,7 @@
               <a:buNone/>
             </a:pPr>
             <a:r>
-              <a:rPr lang="en-US" sz="1200" dirty="0">
+              <a:rPr lang="en-US" sz="1200">
                 <a:solidFill>
                   <a:srgbClr val="0D1B2A"/>
                 </a:solidFill>
@@ -7383,7 +7425,7 @@
               </a:rPr>
               <a:t>Focus repair efforts on AL, MA and PI immediately ,these 3 states account for the worst late delivery rates</a:t>
             </a:r>
-            <a:endParaRPr lang="en-US" sz="1200" dirty="0"/>
+            <a:endParaRPr lang="en-US" sz="1200"/>
           </a:p>
         </p:txBody>
       </p:sp>
@@ -7473,7 +7515,7 @@
               <a:buNone/>
             </a:pPr>
             <a:r>
-              <a:rPr lang="en-US" sz="1800" b="1" dirty="0">
+              <a:rPr lang="en-US" sz="1800" b="1">
                 <a:solidFill>
                   <a:srgbClr val="FFFFFF"/>
                 </a:solidFill>
@@ -7483,7 +7525,7 @@
               </a:rPr>
               <a:t>2</a:t>
             </a:r>
-            <a:endParaRPr lang="en-US" sz="1800" dirty="0"/>
+            <a:endParaRPr lang="en-US" sz="1800"/>
           </a:p>
         </p:txBody>
       </p:sp>
@@ -7512,7 +7554,7 @@
               <a:buNone/>
             </a:pPr>
             <a:r>
-              <a:rPr lang="en-US" sz="1200" dirty="0">
+              <a:rPr lang="en-US" sz="1200">
                 <a:solidFill>
                   <a:srgbClr val="0D1B2A"/>
                 </a:solidFill>
@@ -7522,7 +7564,7 @@
               </a:rPr>
               <a:t>Partner with local couriers in northeast Brazil to reduce reliance on long-haul shipping routes</a:t>
             </a:r>
-            <a:endParaRPr lang="en-US" sz="1200" dirty="0"/>
+            <a:endParaRPr lang="en-US" sz="1200"/>
           </a:p>
         </p:txBody>
       </p:sp>
@@ -7612,7 +7654,7 @@
               <a:buNone/>
             </a:pPr>
             <a:r>
-              <a:rPr lang="en-US" sz="1800" b="1" dirty="0">
+              <a:rPr lang="en-US" sz="1800" b="1">
                 <a:solidFill>
                   <a:srgbClr val="FFFFFF"/>
                 </a:solidFill>
@@ -7622,7 +7664,7 @@
               </a:rPr>
               <a:t>3</a:t>
             </a:r>
-            <a:endParaRPr lang="en-US" sz="1800" dirty="0"/>
+            <a:endParaRPr lang="en-US" sz="1800"/>
           </a:p>
         </p:txBody>
       </p:sp>
@@ -7651,7 +7693,7 @@
               <a:buNone/>
             </a:pPr>
             <a:r>
-              <a:rPr lang="en-US" sz="1200" dirty="0">
+              <a:rPr lang="en-US" sz="1200">
                 <a:solidFill>
                   <a:srgbClr val="0D1B2A"/>
                 </a:solidFill>
@@ -7661,7 +7703,7 @@
               </a:rPr>
               <a:t>Set region-specific delivery estimates , stop promising the same date to all customers regardless of location</a:t>
             </a:r>
-            <a:endParaRPr lang="en-US" sz="1200" dirty="0"/>
+            <a:endParaRPr lang="en-US" sz="1200"/>
           </a:p>
         </p:txBody>
       </p:sp>
@@ -7751,7 +7793,7 @@
               <a:buNone/>
             </a:pPr>
             <a:r>
-              <a:rPr lang="en-US" sz="1800" b="1" dirty="0">
+              <a:rPr lang="en-US" sz="1800" b="1">
                 <a:solidFill>
                   <a:srgbClr val="FFFFFF"/>
                 </a:solidFill>
@@ -7761,7 +7803,7 @@
               </a:rPr>
               <a:t>4</a:t>
             </a:r>
-            <a:endParaRPr lang="en-US" sz="1800" dirty="0"/>
+            <a:endParaRPr lang="en-US" sz="1800"/>
           </a:p>
         </p:txBody>
       </p:sp>
@@ -7790,7 +7832,7 @@
               <a:buNone/>
             </a:pPr>
             <a:r>
-              <a:rPr lang="en-US" sz="1200" dirty="0">
+              <a:rPr lang="en-US" sz="1200">
                 <a:solidFill>
                   <a:srgbClr val="0D1B2A"/>
                 </a:solidFill>
@@ -7800,7 +7842,7 @@
               </a:rPr>
               <a:t>Monitor monthly late rate and target below 5% ,the current worsening trend requires urgent intervention</a:t>
             </a:r>
-            <a:endParaRPr lang="en-US" sz="1200" dirty="0"/>
+            <a:endParaRPr lang="en-US" sz="1200"/>
           </a:p>
         </p:txBody>
       </p:sp>
@@ -7890,7 +7932,7 @@
               <a:buNone/>
             </a:pPr>
             <a:r>
-              <a:rPr lang="en-US" sz="1800" b="1" dirty="0">
+              <a:rPr lang="en-US" sz="1800" b="1">
                 <a:solidFill>
                   <a:srgbClr val="FFFFFF"/>
                 </a:solidFill>
@@ -7900,7 +7942,7 @@
               </a:rPr>
               <a:t>5</a:t>
             </a:r>
-            <a:endParaRPr lang="en-US" sz="1800" dirty="0"/>
+            <a:endParaRPr lang="en-US" sz="1800"/>
           </a:p>
         </p:txBody>
       </p:sp>
@@ -7929,7 +7971,7 @@
               <a:buNone/>
             </a:pPr>
             <a:r>
-              <a:rPr lang="en-US" sz="1200" dirty="0">
+              <a:rPr lang="en-US" sz="1200">
                 <a:solidFill>
                   <a:srgbClr val="0D1B2A"/>
                 </a:solidFill>
@@ -7939,7 +7981,7 @@
               </a:rPr>
               <a:t>Flag Food and Home Comfort categories for priority shipping , they have the smallest early delivery margins</a:t>
             </a:r>
-            <a:endParaRPr lang="en-US" sz="1200" dirty="0"/>
+            <a:endParaRPr lang="en-US" sz="1200"/>
           </a:p>
         </p:txBody>
       </p:sp>
@@ -7999,7 +8041,7 @@
           <a:bodyPr/>
           <a:lstStyle/>
           <a:p>
-            <a:endParaRPr lang="en-GH" dirty="0"/>
+            <a:endParaRPr lang="en-GH"/>
           </a:p>
         </p:txBody>
       </p:sp>
@@ -8053,7 +8095,7 @@
           <a:bodyPr/>
           <a:lstStyle/>
           <a:p>
-            <a:endParaRPr lang="en-GH" dirty="0"/>
+            <a:endParaRPr lang="en-GH"/>
           </a:p>
         </p:txBody>
       </p:sp>
@@ -8082,7 +8124,7 @@
               <a:buNone/>
             </a:pPr>
             <a:r>
-              <a:rPr lang="en-US" sz="4800" b="1" kern="0" spc="600" dirty="0">
+              <a:rPr lang="en-US" sz="4800" b="1" kern="0" spc="600">
                 <a:solidFill>
                   <a:srgbClr val="FFFFFF"/>
                 </a:solidFill>
@@ -8092,7 +8134,7 @@
               </a:rPr>
               <a:t>THANK YOU</a:t>
             </a:r>
-            <a:endParaRPr lang="en-US" sz="4800" dirty="0"/>
+            <a:endParaRPr lang="en-US" sz="4800"/>
           </a:p>
         </p:txBody>
       </p:sp>
@@ -8120,7 +8162,7 @@
             <a:pPr marL="0" indent="0" algn="ctr">
               <a:buNone/>
             </a:pPr>
-            <a:endParaRPr lang="en-US" sz="1600" dirty="0"/>
+            <a:endParaRPr lang="en-US" sz="1600"/>
           </a:p>
         </p:txBody>
       </p:sp>
@@ -8149,7 +8191,7 @@
               <a:buSzPct val="100000"/>
               <a:buChar char="•"/>
             </a:pPr>
-            <a:endParaRPr lang="en-US" sz="1300" dirty="0"/>
+            <a:endParaRPr lang="en-US" sz="1300"/>
           </a:p>
         </p:txBody>
       </p:sp>
@@ -8177,7 +8219,7 @@
             <a:pPr marL="0" indent="0" algn="ctr">
               <a:buNone/>
             </a:pPr>
-            <a:endParaRPr lang="en-US" sz="1300" dirty="0"/>
+            <a:endParaRPr lang="en-US" sz="1300"/>
           </a:p>
         </p:txBody>
       </p:sp>
